--- a/decks/hist-slave-trade/hist-slave-trade_ch5_abolition.pptx
+++ b/decks/hist-slave-trade/hist-slave-trade_ch5_abolition.pptx
@@ -124,30 +124,30 @@
   <p:extLst>
     <p:ext uri="{521415D9-36F7-43E2-AB2F-B90AF26B5E84}">
       <p14:sectionLst xmlns:p14="http://schemas.microsoft.com/office/powerpoint/2010/main">
-        <p14:section name="Opening" id="{baf3b72a-3049-63d3-1717-dd8f498e9be4}">
+        <p14:section name="Opening" id="{ea65f639-80e2-3eaa-3972-be4f22838a0c}">
           <p14:sldIdLst>
             <p14:sldId id="256"/>
           </p14:sldIdLst>
         </p14:section>
-        <p14:section name="Gate" id="{1c36a567-1269-fb21-b334-571fc10a2d25}">
+        <p14:section name="Gate" id="{a48b513e-7dae-689f-1726-31c880edf7e6}">
           <p14:sldIdLst>
             <p14:sldId id="257"/>
             <p14:sldId id="258"/>
           </p14:sldIdLst>
         </p14:section>
-        <p14:section name="Pre-teach" id="{ec71366c-0a8d-4a92-7fd9-cde35cf9d304}">
+        <p14:section name="Pre-teach" id="{88e25007-0fe0-cbd6-bd3a-0aa6cff4f58a}">
           <p14:sldIdLst>
             <p14:sldId id="259"/>
             <p14:sldId id="260"/>
           </p14:sldIdLst>
         </p14:section>
-        <p14:section name="Read-along" id="{3b19997b-0be4-30cd-7b12-1574d8850fcc}">
+        <p14:section name="Read-along" id="{709163ca-4fac-0c17-4e50-9957f39f9d22}">
           <p14:sldIdLst>
             <p14:sldId id="261"/>
             <p14:sldId id="262"/>
           </p14:sldIdLst>
         </p14:section>
-        <p14:section name="Teach" id="{6fa501b7-51f3-ef54-d6b0-a1c79cfe0f40}">
+        <p14:section name="Teach" id="{1e9ebef0-c617-5750-84cb-e2b65ef53b84}">
           <p14:sldIdLst>
             <p14:sldId id="263"/>
             <p14:sldId id="264"/>
@@ -155,19 +155,19 @@
             <p14:sldId id="266"/>
           </p14:sldIdLst>
         </p14:section>
-        <p14:section name="Routes" id="{431a4592-d4e6-53eb-b54d-44a146f61389}">
+        <p14:section name="Routes" id="{6561c8ae-6bd4-3e13-f6b4-78c9e5e5493e}">
           <p14:sldIdLst>
             <p14:sldId id="267"/>
             <p14:sldId id="268"/>
             <p14:sldId id="269"/>
           </p14:sldIdLst>
         </p14:section>
-        <p14:section name="Close" id="{a84dd00a-bd14-1076-63ad-c1585bd7c138}">
+        <p14:section name="Close" id="{258a7fd4-715f-38a3-794a-011ca866a5a9}">
           <p14:sldIdLst>
             <p14:sldId id="270"/>
           </p14:sldIdLst>
         </p14:section>
-        <p14:section name="Answers" id="{04a2ad43-5d4b-eb64-d148-54bb92aba781}">
+        <p14:section name="Answers" id="{8fcbbad4-150e-5c1a-204d-4470cd549980}">
           <p14:sldIdLst>
             <p14:sldId id="271"/>
             <p14:sldId id="272"/>
@@ -1504,7 +1504,7 @@
               <a:t>Do now — retrieval. Silent, no notes, no help: recall comes before any support. Give about four minutes.
 1. In which year did Parliament pass the Act that ended slavery across the British Empire?  →  1833
 2. Olaudah Equiano and Ottobah Cugoano were ___ enslaved people who campaigned against slavery.  →  formerly
-3. Who received the twenty million pounds compensation paid by the British government in the 1830s?  →  A   Slave owners, for the loss of what they called their property
+3. Who received the twenty million pounds compensation paid by the British government in the 1830s?  →  B   Slave owners, for the loss of what they called their property
 Circulate: who gets 3/3 (Stretch route), 2/3 (Core), 0–1 (Support)? Use this to route pupils later in the lesson.</a:t>
             </a:r>
             <a:endParaRPr lang="en-US" dirty="0"/>
@@ -1596,7 +1596,7 @@
               <a:t>Answers — pupils mark their own in a different colour, then hands up for 3/3, 2/3, 1/3.
 1. 1833. The Abolition Act of 1833 ended slavery itself across the British Empire. 1807 had ended only the trade.
 2. formerly. Both men had been enslaved and later gained their freedom; they used their own experience in the campaign.
-3. A   Slave owners, for the loss of what they called their property. The compensation went to the owners. The people who had been enslaved received nothing, which is why the scheme is remembered as unfair.
+3. B   Slave owners, for the loss of what they called their property. The compensation went to the owners. The people who had been enslaved received nothing, which is why the scheme is remembered as unfair.
 Say the route each score points to: 3/3 Stretch, 2/3 Core, 0–1 Support. Pupils may choose to move up.</a:t>
             </a:r>
             <a:endParaRPr lang="en-US" dirty="0"/>
@@ -10613,7 +10613,7 @@
                 <a:ea typeface="Calibri" pitchFamily="34" charset="-122"/>
                 <a:cs typeface="Calibri" pitchFamily="34" charset="-120"/>
               </a:rPr>
-              <a:t>Slave owners, for the loss of what they called their property</a:t>
+              <a:t>The people who had been enslaved</a:t>
             </a:r>
             <a:endParaRPr lang="en-US" sz="1800" dirty="0"/>
           </a:p>
@@ -10650,7 +10650,7 @@
                 <a:ea typeface="Calibri" pitchFamily="34" charset="-122"/>
                 <a:cs typeface="Calibri" pitchFamily="34" charset="-120"/>
               </a:rPr>
-              <a:t>The people who had been enslaved</a:t>
+              <a:t>Slave owners, for the loss of what they called their property</a:t>
             </a:r>
             <a:endParaRPr lang="en-US" sz="1800" dirty="0"/>
           </a:p>
@@ -10687,7 +10687,7 @@
                 <a:ea typeface="Calibri" pitchFamily="34" charset="-122"/>
                 <a:cs typeface="Calibri" pitchFamily="34" charset="-120"/>
               </a:rPr>
-              <a:t>The abolitionists, to repay their campaign costs</a:t>
+              <a:t>The African kingdoms the people had been taken from</a:t>
             </a:r>
             <a:endParaRPr lang="en-US" sz="1800" dirty="0"/>
           </a:p>
@@ -10724,7 +10724,7 @@
                 <a:ea typeface="Calibri" pitchFamily="34" charset="-122"/>
                 <a:cs typeface="Calibri" pitchFamily="34" charset="-120"/>
               </a:rPr>
-              <a:t>The African kingdoms the people had been taken from</a:t>
+              <a:t>The abolitionists, to repay their campaign costs</a:t>
             </a:r>
             <a:endParaRPr lang="en-US" sz="1800" dirty="0"/>
           </a:p>
@@ -11585,7 +11585,7 @@
                 <a:ea typeface="Calibri" pitchFamily="34" charset="-122"/>
                 <a:cs typeface="Calibri" pitchFamily="34" charset="-120"/>
               </a:rPr>
-              <a:t>A   Slave owners, for the loss of what they called their property</a:t>
+              <a:t>B   Slave owners, for the loss of what they called their property</a:t>
             </a:r>
             <a:endParaRPr lang="en-US" sz="2200" dirty="0"/>
           </a:p>

--- a/decks/hist-slave-trade/hist-slave-trade_ch5_abolition.pptx
+++ b/decks/hist-slave-trade/hist-slave-trade_ch5_abolition.pptx
@@ -124,30 +124,30 @@
   <p:extLst>
     <p:ext uri="{521415D9-36F7-43E2-AB2F-B90AF26B5E84}">
       <p14:sectionLst xmlns:p14="http://schemas.microsoft.com/office/powerpoint/2010/main">
-        <p14:section name="Opening" id="{ea65f639-80e2-3eaa-3972-be4f22838a0c}">
+        <p14:section name="Opening" id="{45f73625-dbbf-643f-456c-52aca70fa0d5}">
           <p14:sldIdLst>
             <p14:sldId id="256"/>
           </p14:sldIdLst>
         </p14:section>
-        <p14:section name="Gate" id="{a48b513e-7dae-689f-1726-31c880edf7e6}">
+        <p14:section name="Gate" id="{6054f2cd-526c-ab8f-d96b-3e6f8f84101c}">
           <p14:sldIdLst>
             <p14:sldId id="257"/>
             <p14:sldId id="258"/>
           </p14:sldIdLst>
         </p14:section>
-        <p14:section name="Pre-teach" id="{88e25007-0fe0-cbd6-bd3a-0aa6cff4f58a}">
+        <p14:section name="Pre-teach" id="{ec48beb4-8172-480f-d88f-fa394d5c09d1}">
           <p14:sldIdLst>
             <p14:sldId id="259"/>
             <p14:sldId id="260"/>
           </p14:sldIdLst>
         </p14:section>
-        <p14:section name="Read-along" id="{709163ca-4fac-0c17-4e50-9957f39f9d22}">
+        <p14:section name="Read-along" id="{53fd7571-9d37-b472-e8a6-30a56fcc96a4}">
           <p14:sldIdLst>
             <p14:sldId id="261"/>
             <p14:sldId id="262"/>
           </p14:sldIdLst>
         </p14:section>
-        <p14:section name="Teach" id="{1e9ebef0-c617-5750-84cb-e2b65ef53b84}">
+        <p14:section name="Teach" id="{7185e46c-eb42-d931-9f61-c91b6f2a4718}">
           <p14:sldIdLst>
             <p14:sldId id="263"/>
             <p14:sldId id="264"/>
@@ -155,19 +155,19 @@
             <p14:sldId id="266"/>
           </p14:sldIdLst>
         </p14:section>
-        <p14:section name="Routes" id="{6561c8ae-6bd4-3e13-f6b4-78c9e5e5493e}">
+        <p14:section name="Routes" id="{0031b8a1-17e0-9180-69ec-4606b8819cfa}">
           <p14:sldIdLst>
             <p14:sldId id="267"/>
             <p14:sldId id="268"/>
             <p14:sldId id="269"/>
           </p14:sldIdLst>
         </p14:section>
-        <p14:section name="Close" id="{258a7fd4-715f-38a3-794a-011ca866a5a9}">
+        <p14:section name="Close" id="{4d911ee4-0668-f0de-9932-ad8aeaa96f5a}">
           <p14:sldIdLst>
             <p14:sldId id="270"/>
           </p14:sldIdLst>
         </p14:section>
-        <p14:section name="Answers" id="{8fcbbad4-150e-5c1a-204d-4470cd549980}">
+        <p14:section name="Answers" id="{4e229459-708b-68ea-d37d-ffea26b4bafa}">
           <p14:sldIdLst>
             <p14:sldId id="271"/>
             <p14:sldId id="272"/>
